--- a/modelo_certificado.pptx
+++ b/modelo_certificado.pptx
@@ -243,7 +243,7 @@
           <a:p>
             <a:fld id="{67F0E9EE-552A-448C-92B9-4553866A4319}" type="datetimeFigureOut">
               <a:rPr lang="pt-BR" smtClean="0"/>
-              <a:t>27/04/2026</a:t>
+              <a:t>28/04/2026</a:t>
             </a:fld>
             <a:endParaRPr lang="pt-BR"/>
           </a:p>
@@ -413,7 +413,7 @@
           <a:p>
             <a:fld id="{67F0E9EE-552A-448C-92B9-4553866A4319}" type="datetimeFigureOut">
               <a:rPr lang="pt-BR" smtClean="0"/>
-              <a:t>27/04/2026</a:t>
+              <a:t>28/04/2026</a:t>
             </a:fld>
             <a:endParaRPr lang="pt-BR"/>
           </a:p>
@@ -593,7 +593,7 @@
           <a:p>
             <a:fld id="{67F0E9EE-552A-448C-92B9-4553866A4319}" type="datetimeFigureOut">
               <a:rPr lang="pt-BR" smtClean="0"/>
-              <a:t>27/04/2026</a:t>
+              <a:t>28/04/2026</a:t>
             </a:fld>
             <a:endParaRPr lang="pt-BR"/>
           </a:p>
@@ -763,7 +763,7 @@
           <a:p>
             <a:fld id="{67F0E9EE-552A-448C-92B9-4553866A4319}" type="datetimeFigureOut">
               <a:rPr lang="pt-BR" smtClean="0"/>
-              <a:t>27/04/2026</a:t>
+              <a:t>28/04/2026</a:t>
             </a:fld>
             <a:endParaRPr lang="pt-BR"/>
           </a:p>
@@ -1009,7 +1009,7 @@
           <a:p>
             <a:fld id="{67F0E9EE-552A-448C-92B9-4553866A4319}" type="datetimeFigureOut">
               <a:rPr lang="pt-BR" smtClean="0"/>
-              <a:t>27/04/2026</a:t>
+              <a:t>28/04/2026</a:t>
             </a:fld>
             <a:endParaRPr lang="pt-BR"/>
           </a:p>
@@ -1241,7 +1241,7 @@
           <a:p>
             <a:fld id="{67F0E9EE-552A-448C-92B9-4553866A4319}" type="datetimeFigureOut">
               <a:rPr lang="pt-BR" smtClean="0"/>
-              <a:t>27/04/2026</a:t>
+              <a:t>28/04/2026</a:t>
             </a:fld>
             <a:endParaRPr lang="pt-BR"/>
           </a:p>
@@ -1608,7 +1608,7 @@
           <a:p>
             <a:fld id="{67F0E9EE-552A-448C-92B9-4553866A4319}" type="datetimeFigureOut">
               <a:rPr lang="pt-BR" smtClean="0"/>
-              <a:t>27/04/2026</a:t>
+              <a:t>28/04/2026</a:t>
             </a:fld>
             <a:endParaRPr lang="pt-BR"/>
           </a:p>
@@ -1726,7 +1726,7 @@
           <a:p>
             <a:fld id="{67F0E9EE-552A-448C-92B9-4553866A4319}" type="datetimeFigureOut">
               <a:rPr lang="pt-BR" smtClean="0"/>
-              <a:t>27/04/2026</a:t>
+              <a:t>28/04/2026</a:t>
             </a:fld>
             <a:endParaRPr lang="pt-BR"/>
           </a:p>
@@ -1821,7 +1821,7 @@
           <a:p>
             <a:fld id="{67F0E9EE-552A-448C-92B9-4553866A4319}" type="datetimeFigureOut">
               <a:rPr lang="pt-BR" smtClean="0"/>
-              <a:t>27/04/2026</a:t>
+              <a:t>28/04/2026</a:t>
             </a:fld>
             <a:endParaRPr lang="pt-BR"/>
           </a:p>
@@ -2098,7 +2098,7 @@
           <a:p>
             <a:fld id="{67F0E9EE-552A-448C-92B9-4553866A4319}" type="datetimeFigureOut">
               <a:rPr lang="pt-BR" smtClean="0"/>
-              <a:t>27/04/2026</a:t>
+              <a:t>28/04/2026</a:t>
             </a:fld>
             <a:endParaRPr lang="pt-BR"/>
           </a:p>
@@ -2355,7 +2355,7 @@
           <a:p>
             <a:fld id="{67F0E9EE-552A-448C-92B9-4553866A4319}" type="datetimeFigureOut">
               <a:rPr lang="pt-BR" smtClean="0"/>
-              <a:t>27/04/2026</a:t>
+              <a:t>28/04/2026</a:t>
             </a:fld>
             <a:endParaRPr lang="pt-BR"/>
           </a:p>
@@ -2568,7 +2568,7 @@
           <a:p>
             <a:fld id="{67F0E9EE-552A-448C-92B9-4553866A4319}" type="datetimeFigureOut">
               <a:rPr lang="pt-BR" smtClean="0"/>
-              <a:t>27/04/2026</a:t>
+              <a:t>28/04/2026</a:t>
             </a:fld>
             <a:endParaRPr lang="pt-BR"/>
           </a:p>
@@ -3064,10 +3064,10 @@
           <p:nvPr/>
         </p:nvPicPr>
         <p:blipFill>
-          <a:blip r:embed="rId3">
+          <a:blip>
             <a:extLst>
               <a:ext uri="{96DAC541-7B7A-43D3-8B79-37D633B846F1}">
-                <asvg:svgBlip xmlns:asvg="http://schemas.microsoft.com/office/drawing/2016/SVG/main" r:embed="rId4"/>
+                <asvg:svgBlip xmlns:asvg="http://schemas.microsoft.com/office/drawing/2016/SVG/main" r:embed="rId3"/>
               </a:ext>
             </a:extLst>
           </a:blip>
@@ -3252,7 +3252,7 @@
               <a:t>Certificamos que </a:t>
             </a:r>
             <a:r>
-              <a:rPr lang="pt-BR" sz="1600">
+              <a:rPr lang="pt-BR" sz="1600" b="1" dirty="0">
                 <a:solidFill>
                   <a:srgbClr val="00599E"/>
                 </a:solidFill>
@@ -3263,16 +3263,6 @@
               <a:t>[NOME] </a:t>
             </a:r>
             <a:r>
-              <a:rPr lang="pt-BR" sz="1600">
-                <a:solidFill>
-                  <a:srgbClr val="00599E"/>
-                </a:solidFill>
-                <a:ea typeface="Calibri" panose="020F0502020204030204" pitchFamily="34" charset="0"/>
-                <a:cs typeface="Times New Roman" panose="02020603050405020304" pitchFamily="18" charset="0"/>
-              </a:rPr>
-              <a:t>participou </a:t>
-            </a:r>
-            <a:r>
               <a:rPr lang="pt-BR" sz="1600" dirty="0">
                 <a:solidFill>
                   <a:srgbClr val="00599E"/>
@@ -3280,7 +3270,7 @@
                 <a:ea typeface="Calibri" panose="020F0502020204030204" pitchFamily="34" charset="0"/>
                 <a:cs typeface="Times New Roman" panose="02020603050405020304" pitchFamily="18" charset="0"/>
               </a:rPr>
-              <a:t>do </a:t>
+              <a:t>participou do </a:t>
             </a:r>
             <a:r>
               <a:rPr lang="pt-BR" sz="1600" b="1" dirty="0">
@@ -3357,10 +3347,10 @@
           <p:nvPr/>
         </p:nvPicPr>
         <p:blipFill>
-          <a:blip r:embed="rId5">
+          <a:blip>
             <a:extLst>
               <a:ext uri="{96DAC541-7B7A-43D3-8B79-37D633B846F1}">
-                <asvg:svgBlip xmlns:asvg="http://schemas.microsoft.com/office/drawing/2016/SVG/main" r:embed="rId6"/>
+                <asvg:svgBlip xmlns:asvg="http://schemas.microsoft.com/office/drawing/2016/SVG/main" r:embed="rId4"/>
               </a:ext>
             </a:extLst>
           </a:blip>
@@ -3393,7 +3383,7 @@
           <p:nvPr/>
         </p:nvPicPr>
         <p:blipFill>
-          <a:blip r:embed="rId7">
+          <a:blip r:embed="rId5">
             <a:extLst>
               <a:ext uri="{28A0092B-C50C-407E-A947-70E740481C1C}">
                 <a14:useLocalDpi xmlns:a14="http://schemas.microsoft.com/office/drawing/2010/main" val="0"/>
@@ -3743,6 +3733,26 @@
 </file>
 
 <file path=customXml/item1.xml><?xml version="1.0" encoding="utf-8"?>
+<p:properties xmlns:p="http://schemas.microsoft.com/office/2006/metadata/properties" xmlns:xsi="http://www.w3.org/2001/XMLSchema-instance" xmlns:pc="http://schemas.microsoft.com/office/infopath/2007/PartnerControls">
+  <documentManagement>
+    <TaxCatchAll xmlns="a6683bdb-b07b-4cc1-bb82-ad4fae711c06" xsi:nil="true"/>
+    <lcf76f155ced4ddcb4097134ff3c332f xmlns="123eb23d-3ad1-49db-90bd-82072a43b63e">
+      <Terms xmlns="http://schemas.microsoft.com/office/infopath/2007/PartnerControls"/>
+    </lcf76f155ced4ddcb4097134ff3c332f>
+  </documentManagement>
+</p:properties>
+</file>
+
+<file path=customXml/item2.xml><?xml version="1.0" encoding="utf-8"?>
+<?mso-contentType ?>
+<FormTemplates xmlns="http://schemas.microsoft.com/sharepoint/v3/contenttype/forms">
+  <Display>DocumentLibraryForm</Display>
+  <Edit>DocumentLibraryForm</Edit>
+  <New>DocumentLibraryForm</New>
+</FormTemplates>
+</file>
+
+<file path=customXml/item3.xml><?xml version="1.0" encoding="utf-8"?>
 <ct:contentTypeSchema xmlns:ct="http://schemas.microsoft.com/office/2006/metadata/contentType" xmlns:ma="http://schemas.microsoft.com/office/2006/metadata/properties/metaAttributes" ct:_="" ma:_="" ma:contentTypeName="Documento" ma:contentTypeID="0x010100C1766D1EC7BFE944BC766B046067A1F0" ma:contentTypeVersion="15" ma:contentTypeDescription="Crie um novo documento." ma:contentTypeScope="" ma:versionID="006c77f02ae7009e19aac67a6ca6939e">
   <xsd:schema xmlns:xsd="http://www.w3.org/2001/XMLSchema" xmlns:xs="http://www.w3.org/2001/XMLSchema" xmlns:p="http://schemas.microsoft.com/office/2006/metadata/properties" xmlns:ns2="123eb23d-3ad1-49db-90bd-82072a43b63e" xmlns:ns3="a6683bdb-b07b-4cc1-bb82-ad4fae711c06" targetNamespace="http://schemas.microsoft.com/office/2006/metadata/properties" ma:root="true" ma:fieldsID="760ac65c7a716a0ac4df4ea5fca3b62b" ns2:_="" ns3:_="">
     <xsd:import namespace="123eb23d-3ad1-49db-90bd-82072a43b63e"/>
@@ -3977,27 +3987,32 @@
 </ct:contentTypeSchema>
 </file>
 
-<file path=customXml/item2.xml><?xml version="1.0" encoding="utf-8"?>
-<?mso-contentType ?>
-<FormTemplates xmlns="http://schemas.microsoft.com/sharepoint/v3/contenttype/forms">
-  <Display>DocumentLibraryForm</Display>
-  <Edit>DocumentLibraryForm</Edit>
-  <New>DocumentLibraryForm</New>
-</FormTemplates>
+<file path=customXml/itemProps1.xml><?xml version="1.0" encoding="utf-8"?>
+<ds:datastoreItem xmlns:ds="http://schemas.openxmlformats.org/officeDocument/2006/customXml" ds:itemID="{042F6BBE-1607-40D4-BC21-104F6AA413FE}">
+  <ds:schemaRefs>
+    <ds:schemaRef ds:uri="http://purl.org/dc/terms/"/>
+    <ds:schemaRef ds:uri="http://purl.org/dc/elements/1.1/"/>
+    <ds:schemaRef ds:uri="http://schemas.microsoft.com/office/2006/documentManagement/types"/>
+    <ds:schemaRef ds:uri="a6683bdb-b07b-4cc1-bb82-ad4fae711c06"/>
+    <ds:schemaRef ds:uri="http://purl.org/dc/dcmitype/"/>
+    <ds:schemaRef ds:uri="http://schemas.openxmlformats.org/package/2006/metadata/core-properties"/>
+    <ds:schemaRef ds:uri="http://schemas.microsoft.com/office/2006/metadata/properties"/>
+    <ds:schemaRef ds:uri="http://schemas.microsoft.com/office/infopath/2007/PartnerControls"/>
+    <ds:schemaRef ds:uri="123eb23d-3ad1-49db-90bd-82072a43b63e"/>
+    <ds:schemaRef ds:uri="http://www.w3.org/XML/1998/namespace"/>
+  </ds:schemaRefs>
+</ds:datastoreItem>
 </file>
 
-<file path=customXml/item3.xml><?xml version="1.0" encoding="utf-8"?>
-<p:properties xmlns:p="http://schemas.microsoft.com/office/2006/metadata/properties" xmlns:xsi="http://www.w3.org/2001/XMLSchema-instance" xmlns:pc="http://schemas.microsoft.com/office/infopath/2007/PartnerControls">
-  <documentManagement>
-    <TaxCatchAll xmlns="a6683bdb-b07b-4cc1-bb82-ad4fae711c06" xsi:nil="true"/>
-    <lcf76f155ced4ddcb4097134ff3c332f xmlns="123eb23d-3ad1-49db-90bd-82072a43b63e">
-      <Terms xmlns="http://schemas.microsoft.com/office/infopath/2007/PartnerControls"/>
-    </lcf76f155ced4ddcb4097134ff3c332f>
-  </documentManagement>
-</p:properties>
+<file path=customXml/itemProps2.xml><?xml version="1.0" encoding="utf-8"?>
+<ds:datastoreItem xmlns:ds="http://schemas.openxmlformats.org/officeDocument/2006/customXml" ds:itemID="{5E2CF0EE-7FFF-4341-9DF2-1BF8B9A36096}">
+  <ds:schemaRefs>
+    <ds:schemaRef ds:uri="http://schemas.microsoft.com/sharepoint/v3/contenttype/forms"/>
+  </ds:schemaRefs>
+</ds:datastoreItem>
 </file>
 
-<file path=customXml/itemProps1.xml><?xml version="1.0" encoding="utf-8"?>
+<file path=customXml/itemProps3.xml><?xml version="1.0" encoding="utf-8"?>
 <ds:datastoreItem xmlns:ds="http://schemas.openxmlformats.org/officeDocument/2006/customXml" ds:itemID="{6CFECA32-5C95-4772-AFA2-E84DE22E3745}">
   <ds:schemaRefs>
     <ds:schemaRef ds:uri="http://schemas.microsoft.com/office/2006/metadata/contentType"/>
@@ -4014,29 +4029,4 @@
     <ds:schemaRef ds:uri="http://schemas.microsoft.com/internal/obd"/>
   </ds:schemaRefs>
 </ds:datastoreItem>
-</file>
-
-<file path=customXml/itemProps2.xml><?xml version="1.0" encoding="utf-8"?>
-<ds:datastoreItem xmlns:ds="http://schemas.openxmlformats.org/officeDocument/2006/customXml" ds:itemID="{5E2CF0EE-7FFF-4341-9DF2-1BF8B9A36096}">
-  <ds:schemaRefs>
-    <ds:schemaRef ds:uri="http://schemas.microsoft.com/sharepoint/v3/contenttype/forms"/>
-  </ds:schemaRefs>
-</ds:datastoreItem>
-</file>
-
-<file path=customXml/itemProps3.xml><?xml version="1.0" encoding="utf-8"?>
-<ds:datastoreItem xmlns:ds="http://schemas.openxmlformats.org/officeDocument/2006/customXml" ds:itemID="{042F6BBE-1607-40D4-BC21-104F6AA413FE}">
-  <ds:schemaRefs>
-    <ds:schemaRef ds:uri="http://purl.org/dc/terms/"/>
-    <ds:schemaRef ds:uri="http://purl.org/dc/elements/1.1/"/>
-    <ds:schemaRef ds:uri="http://schemas.microsoft.com/office/2006/documentManagement/types"/>
-    <ds:schemaRef ds:uri="a6683bdb-b07b-4cc1-bb82-ad4fae711c06"/>
-    <ds:schemaRef ds:uri="http://purl.org/dc/dcmitype/"/>
-    <ds:schemaRef ds:uri="http://schemas.openxmlformats.org/package/2006/metadata/core-properties"/>
-    <ds:schemaRef ds:uri="http://schemas.microsoft.com/office/2006/metadata/properties"/>
-    <ds:schemaRef ds:uri="http://schemas.microsoft.com/office/infopath/2007/PartnerControls"/>
-    <ds:schemaRef ds:uri="123eb23d-3ad1-49db-90bd-82072a43b63e"/>
-    <ds:schemaRef ds:uri="http://www.w3.org/XML/1998/namespace"/>
-  </ds:schemaRefs>
-</ds:datastoreItem>
 </file>
--- a/modelo_certificado.pptx
+++ b/modelo_certificado.pptx
@@ -3222,7 +3222,7 @@
         <p:spPr>
           <a:xfrm>
             <a:off x="891702" y="2614100"/>
-            <a:ext cx="8122596" cy="1164871"/>
+            <a:ext cx="8122596" cy="795539"/>
           </a:xfrm>
           <a:prstGeom prst="rect">
             <a:avLst/>
@@ -3277,11 +3277,21 @@
                 <a:solidFill>
                   <a:srgbClr val="00599E"/>
                 </a:solidFill>
+                <a:ea typeface="Calibri" panose="020F0502020204030204" pitchFamily="34" charset="0"/>
+                <a:cs typeface="Times New Roman" panose="02020603050405020304" pitchFamily="18" charset="0"/>
+              </a:rPr>
+              <a:t>[EVENTO]</a:t>
+            </a:r>
+            <a:r>
+              <a:rPr lang="pt-BR" sz="1600" b="1" dirty="0">
+                <a:solidFill>
+                  <a:srgbClr val="00599E"/>
+                </a:solidFill>
                 <a:effectLst/>
                 <a:ea typeface="Calibri" panose="020F0502020204030204" pitchFamily="34" charset="0"/>
                 <a:cs typeface="Times New Roman" panose="02020603050405020304" pitchFamily="18" charset="0"/>
               </a:rPr>
-              <a:t>Workshop Virtualização Hyper-V,</a:t>
+              <a:t>,</a:t>
             </a:r>
             <a:r>
               <a:rPr lang="pt-BR" sz="1600" dirty="0">
@@ -3312,7 +3322,7 @@
                 <a:ea typeface="Calibri" panose="020F0502020204030204" pitchFamily="34" charset="0"/>
                 <a:cs typeface="Times New Roman" panose="02020603050405020304" pitchFamily="18" charset="0"/>
               </a:rPr>
-              <a:t>Célio Lemos Di Cavalcanti Júnior</a:t>
+              <a:t>[MINISTRANTE]</a:t>
             </a:r>
             <a:r>
               <a:rPr lang="pt-BR" sz="1600" dirty="0">
@@ -3733,26 +3743,6 @@
 </file>
 
 <file path=customXml/item1.xml><?xml version="1.0" encoding="utf-8"?>
-<p:properties xmlns:p="http://schemas.microsoft.com/office/2006/metadata/properties" xmlns:xsi="http://www.w3.org/2001/XMLSchema-instance" xmlns:pc="http://schemas.microsoft.com/office/infopath/2007/PartnerControls">
-  <documentManagement>
-    <TaxCatchAll xmlns="a6683bdb-b07b-4cc1-bb82-ad4fae711c06" xsi:nil="true"/>
-    <lcf76f155ced4ddcb4097134ff3c332f xmlns="123eb23d-3ad1-49db-90bd-82072a43b63e">
-      <Terms xmlns="http://schemas.microsoft.com/office/infopath/2007/PartnerControls"/>
-    </lcf76f155ced4ddcb4097134ff3c332f>
-  </documentManagement>
-</p:properties>
-</file>
-
-<file path=customXml/item2.xml><?xml version="1.0" encoding="utf-8"?>
-<?mso-contentType ?>
-<FormTemplates xmlns="http://schemas.microsoft.com/sharepoint/v3/contenttype/forms">
-  <Display>DocumentLibraryForm</Display>
-  <Edit>DocumentLibraryForm</Edit>
-  <New>DocumentLibraryForm</New>
-</FormTemplates>
-</file>
-
-<file path=customXml/item3.xml><?xml version="1.0" encoding="utf-8"?>
 <ct:contentTypeSchema xmlns:ct="http://schemas.microsoft.com/office/2006/metadata/contentType" xmlns:ma="http://schemas.microsoft.com/office/2006/metadata/properties/metaAttributes" ct:_="" ma:_="" ma:contentTypeName="Documento" ma:contentTypeID="0x010100C1766D1EC7BFE944BC766B046067A1F0" ma:contentTypeVersion="15" ma:contentTypeDescription="Crie um novo documento." ma:contentTypeScope="" ma:versionID="006c77f02ae7009e19aac67a6ca6939e">
   <xsd:schema xmlns:xsd="http://www.w3.org/2001/XMLSchema" xmlns:xs="http://www.w3.org/2001/XMLSchema" xmlns:p="http://schemas.microsoft.com/office/2006/metadata/properties" xmlns:ns2="123eb23d-3ad1-49db-90bd-82072a43b63e" xmlns:ns3="a6683bdb-b07b-4cc1-bb82-ad4fae711c06" targetNamespace="http://schemas.microsoft.com/office/2006/metadata/properties" ma:root="true" ma:fieldsID="760ac65c7a716a0ac4df4ea5fca3b62b" ns2:_="" ns3:_="">
     <xsd:import namespace="123eb23d-3ad1-49db-90bd-82072a43b63e"/>
@@ -3987,32 +3977,27 @@
 </ct:contentTypeSchema>
 </file>
 
-<file path=customXml/itemProps1.xml><?xml version="1.0" encoding="utf-8"?>
-<ds:datastoreItem xmlns:ds="http://schemas.openxmlformats.org/officeDocument/2006/customXml" ds:itemID="{042F6BBE-1607-40D4-BC21-104F6AA413FE}">
-  <ds:schemaRefs>
-    <ds:schemaRef ds:uri="http://purl.org/dc/terms/"/>
-    <ds:schemaRef ds:uri="http://purl.org/dc/elements/1.1/"/>
-    <ds:schemaRef ds:uri="http://schemas.microsoft.com/office/2006/documentManagement/types"/>
-    <ds:schemaRef ds:uri="a6683bdb-b07b-4cc1-bb82-ad4fae711c06"/>
-    <ds:schemaRef ds:uri="http://purl.org/dc/dcmitype/"/>
-    <ds:schemaRef ds:uri="http://schemas.openxmlformats.org/package/2006/metadata/core-properties"/>
-    <ds:schemaRef ds:uri="http://schemas.microsoft.com/office/2006/metadata/properties"/>
-    <ds:schemaRef ds:uri="http://schemas.microsoft.com/office/infopath/2007/PartnerControls"/>
-    <ds:schemaRef ds:uri="123eb23d-3ad1-49db-90bd-82072a43b63e"/>
-    <ds:schemaRef ds:uri="http://www.w3.org/XML/1998/namespace"/>
-  </ds:schemaRefs>
-</ds:datastoreItem>
+<file path=customXml/item2.xml><?xml version="1.0" encoding="utf-8"?>
+<?mso-contentType ?>
+<FormTemplates xmlns="http://schemas.microsoft.com/sharepoint/v3/contenttype/forms">
+  <Display>DocumentLibraryForm</Display>
+  <Edit>DocumentLibraryForm</Edit>
+  <New>DocumentLibraryForm</New>
+</FormTemplates>
 </file>
 
-<file path=customXml/itemProps2.xml><?xml version="1.0" encoding="utf-8"?>
-<ds:datastoreItem xmlns:ds="http://schemas.openxmlformats.org/officeDocument/2006/customXml" ds:itemID="{5E2CF0EE-7FFF-4341-9DF2-1BF8B9A36096}">
-  <ds:schemaRefs>
-    <ds:schemaRef ds:uri="http://schemas.microsoft.com/sharepoint/v3/contenttype/forms"/>
-  </ds:schemaRefs>
-</ds:datastoreItem>
+<file path=customXml/item3.xml><?xml version="1.0" encoding="utf-8"?>
+<p:properties xmlns:p="http://schemas.microsoft.com/office/2006/metadata/properties" xmlns:xsi="http://www.w3.org/2001/XMLSchema-instance" xmlns:pc="http://schemas.microsoft.com/office/infopath/2007/PartnerControls">
+  <documentManagement>
+    <TaxCatchAll xmlns="a6683bdb-b07b-4cc1-bb82-ad4fae711c06" xsi:nil="true"/>
+    <lcf76f155ced4ddcb4097134ff3c332f xmlns="123eb23d-3ad1-49db-90bd-82072a43b63e">
+      <Terms xmlns="http://schemas.microsoft.com/office/infopath/2007/PartnerControls"/>
+    </lcf76f155ced4ddcb4097134ff3c332f>
+  </documentManagement>
+</p:properties>
 </file>
 
-<file path=customXml/itemProps3.xml><?xml version="1.0" encoding="utf-8"?>
+<file path=customXml/itemProps1.xml><?xml version="1.0" encoding="utf-8"?>
 <ds:datastoreItem xmlns:ds="http://schemas.openxmlformats.org/officeDocument/2006/customXml" ds:itemID="{6CFECA32-5C95-4772-AFA2-E84DE22E3745}">
   <ds:schemaRefs>
     <ds:schemaRef ds:uri="http://schemas.microsoft.com/office/2006/metadata/contentType"/>
@@ -4029,4 +4014,29 @@
     <ds:schemaRef ds:uri="http://schemas.microsoft.com/internal/obd"/>
   </ds:schemaRefs>
 </ds:datastoreItem>
+</file>
+
+<file path=customXml/itemProps2.xml><?xml version="1.0" encoding="utf-8"?>
+<ds:datastoreItem xmlns:ds="http://schemas.openxmlformats.org/officeDocument/2006/customXml" ds:itemID="{5E2CF0EE-7FFF-4341-9DF2-1BF8B9A36096}">
+  <ds:schemaRefs>
+    <ds:schemaRef ds:uri="http://schemas.microsoft.com/sharepoint/v3/contenttype/forms"/>
+  </ds:schemaRefs>
+</ds:datastoreItem>
+</file>
+
+<file path=customXml/itemProps3.xml><?xml version="1.0" encoding="utf-8"?>
+<ds:datastoreItem xmlns:ds="http://schemas.openxmlformats.org/officeDocument/2006/customXml" ds:itemID="{042F6BBE-1607-40D4-BC21-104F6AA413FE}">
+  <ds:schemaRefs>
+    <ds:schemaRef ds:uri="http://purl.org/dc/terms/"/>
+    <ds:schemaRef ds:uri="http://purl.org/dc/elements/1.1/"/>
+    <ds:schemaRef ds:uri="http://schemas.microsoft.com/office/2006/documentManagement/types"/>
+    <ds:schemaRef ds:uri="a6683bdb-b07b-4cc1-bb82-ad4fae711c06"/>
+    <ds:schemaRef ds:uri="http://purl.org/dc/dcmitype/"/>
+    <ds:schemaRef ds:uri="http://schemas.openxmlformats.org/package/2006/metadata/core-properties"/>
+    <ds:schemaRef ds:uri="http://schemas.microsoft.com/office/2006/metadata/properties"/>
+    <ds:schemaRef ds:uri="http://schemas.microsoft.com/office/infopath/2007/PartnerControls"/>
+    <ds:schemaRef ds:uri="123eb23d-3ad1-49db-90bd-82072a43b63e"/>
+    <ds:schemaRef ds:uri="http://www.w3.org/XML/1998/namespace"/>
+  </ds:schemaRefs>
+</ds:datastoreItem>
 </file>
--- a/modelo_certificado.pptx
+++ b/modelo_certificado.pptx
@@ -243,7 +243,7 @@
           <a:p>
             <a:fld id="{67F0E9EE-552A-448C-92B9-4553866A4319}" type="datetimeFigureOut">
               <a:rPr lang="pt-BR" smtClean="0"/>
-              <a:t>28/04/2026</a:t>
+              <a:t>29/04/2026</a:t>
             </a:fld>
             <a:endParaRPr lang="pt-BR"/>
           </a:p>
@@ -413,7 +413,7 @@
           <a:p>
             <a:fld id="{67F0E9EE-552A-448C-92B9-4553866A4319}" type="datetimeFigureOut">
               <a:rPr lang="pt-BR" smtClean="0"/>
-              <a:t>28/04/2026</a:t>
+              <a:t>29/04/2026</a:t>
             </a:fld>
             <a:endParaRPr lang="pt-BR"/>
           </a:p>
@@ -593,7 +593,7 @@
           <a:p>
             <a:fld id="{67F0E9EE-552A-448C-92B9-4553866A4319}" type="datetimeFigureOut">
               <a:rPr lang="pt-BR" smtClean="0"/>
-              <a:t>28/04/2026</a:t>
+              <a:t>29/04/2026</a:t>
             </a:fld>
             <a:endParaRPr lang="pt-BR"/>
           </a:p>
@@ -763,7 +763,7 @@
           <a:p>
             <a:fld id="{67F0E9EE-552A-448C-92B9-4553866A4319}" type="datetimeFigureOut">
               <a:rPr lang="pt-BR" smtClean="0"/>
-              <a:t>28/04/2026</a:t>
+              <a:t>29/04/2026</a:t>
             </a:fld>
             <a:endParaRPr lang="pt-BR"/>
           </a:p>
@@ -1009,7 +1009,7 @@
           <a:p>
             <a:fld id="{67F0E9EE-552A-448C-92B9-4553866A4319}" type="datetimeFigureOut">
               <a:rPr lang="pt-BR" smtClean="0"/>
-              <a:t>28/04/2026</a:t>
+              <a:t>29/04/2026</a:t>
             </a:fld>
             <a:endParaRPr lang="pt-BR"/>
           </a:p>
@@ -1241,7 +1241,7 @@
           <a:p>
             <a:fld id="{67F0E9EE-552A-448C-92B9-4553866A4319}" type="datetimeFigureOut">
               <a:rPr lang="pt-BR" smtClean="0"/>
-              <a:t>28/04/2026</a:t>
+              <a:t>29/04/2026</a:t>
             </a:fld>
             <a:endParaRPr lang="pt-BR"/>
           </a:p>
@@ -1608,7 +1608,7 @@
           <a:p>
             <a:fld id="{67F0E9EE-552A-448C-92B9-4553866A4319}" type="datetimeFigureOut">
               <a:rPr lang="pt-BR" smtClean="0"/>
-              <a:t>28/04/2026</a:t>
+              <a:t>29/04/2026</a:t>
             </a:fld>
             <a:endParaRPr lang="pt-BR"/>
           </a:p>
@@ -1726,7 +1726,7 @@
           <a:p>
             <a:fld id="{67F0E9EE-552A-448C-92B9-4553866A4319}" type="datetimeFigureOut">
               <a:rPr lang="pt-BR" smtClean="0"/>
-              <a:t>28/04/2026</a:t>
+              <a:t>29/04/2026</a:t>
             </a:fld>
             <a:endParaRPr lang="pt-BR"/>
           </a:p>
@@ -1821,7 +1821,7 @@
           <a:p>
             <a:fld id="{67F0E9EE-552A-448C-92B9-4553866A4319}" type="datetimeFigureOut">
               <a:rPr lang="pt-BR" smtClean="0"/>
-              <a:t>28/04/2026</a:t>
+              <a:t>29/04/2026</a:t>
             </a:fld>
             <a:endParaRPr lang="pt-BR"/>
           </a:p>
@@ -2098,7 +2098,7 @@
           <a:p>
             <a:fld id="{67F0E9EE-552A-448C-92B9-4553866A4319}" type="datetimeFigureOut">
               <a:rPr lang="pt-BR" smtClean="0"/>
-              <a:t>28/04/2026</a:t>
+              <a:t>29/04/2026</a:t>
             </a:fld>
             <a:endParaRPr lang="pt-BR"/>
           </a:p>
@@ -2355,7 +2355,7 @@
           <a:p>
             <a:fld id="{67F0E9EE-552A-448C-92B9-4553866A4319}" type="datetimeFigureOut">
               <a:rPr lang="pt-BR" smtClean="0"/>
-              <a:t>28/04/2026</a:t>
+              <a:t>29/04/2026</a:t>
             </a:fld>
             <a:endParaRPr lang="pt-BR"/>
           </a:p>
@@ -2568,7 +2568,7 @@
           <a:p>
             <a:fld id="{67F0E9EE-552A-448C-92B9-4553866A4319}" type="datetimeFigureOut">
               <a:rPr lang="pt-BR" smtClean="0"/>
-              <a:t>28/04/2026</a:t>
+              <a:t>29/04/2026</a:t>
             </a:fld>
             <a:endParaRPr lang="pt-BR"/>
           </a:p>
@@ -3142,8 +3142,8 @@
         </p:nvSpPr>
         <p:spPr>
           <a:xfrm>
-            <a:off x="3466391" y="4724209"/>
-            <a:ext cx="2830005" cy="492443"/>
+            <a:off x="3662758" y="4724209"/>
+            <a:ext cx="2437270" cy="492443"/>
           </a:xfrm>
           <a:prstGeom prst="rect">
             <a:avLst/>
@@ -3166,29 +3166,7 @@
                 <a:ea typeface="Calibri" panose="020F0502020204030204" pitchFamily="34" charset="0"/>
                 <a:cs typeface="Times New Roman" panose="02020603050405020304" pitchFamily="18" charset="0"/>
               </a:rPr>
-              <a:t>Célio Lemos </a:t>
-            </a:r>
-            <a:r>
-              <a:rPr lang="pt-BR" sz="1400" b="1" dirty="0" err="1">
-                <a:solidFill>
-                  <a:srgbClr val="0D5496"/>
-                </a:solidFill>
-                <a:effectLst/>
-                <a:ea typeface="Calibri" panose="020F0502020204030204" pitchFamily="34" charset="0"/>
-                <a:cs typeface="Times New Roman" panose="02020603050405020304" pitchFamily="18" charset="0"/>
-              </a:rPr>
-              <a:t>di</a:t>
-            </a:r>
-            <a:r>
-              <a:rPr lang="pt-BR" sz="1400" b="1" dirty="0">
-                <a:solidFill>
-                  <a:srgbClr val="0D5496"/>
-                </a:solidFill>
-                <a:effectLst/>
-                <a:ea typeface="Calibri" panose="020F0502020204030204" pitchFamily="34" charset="0"/>
-                <a:cs typeface="Times New Roman" panose="02020603050405020304" pitchFamily="18" charset="0"/>
-              </a:rPr>
-              <a:t> Cavalcanti Junior</a:t>
+              <a:t>[MINISTRANTE]</a:t>
             </a:r>
           </a:p>
           <a:p>
@@ -3743,6 +3721,26 @@
 </file>
 
 <file path=customXml/item1.xml><?xml version="1.0" encoding="utf-8"?>
+<p:properties xmlns:p="http://schemas.microsoft.com/office/2006/metadata/properties" xmlns:xsi="http://www.w3.org/2001/XMLSchema-instance" xmlns:pc="http://schemas.microsoft.com/office/infopath/2007/PartnerControls">
+  <documentManagement>
+    <TaxCatchAll xmlns="a6683bdb-b07b-4cc1-bb82-ad4fae711c06" xsi:nil="true"/>
+    <lcf76f155ced4ddcb4097134ff3c332f xmlns="123eb23d-3ad1-49db-90bd-82072a43b63e">
+      <Terms xmlns="http://schemas.microsoft.com/office/infopath/2007/PartnerControls"/>
+    </lcf76f155ced4ddcb4097134ff3c332f>
+  </documentManagement>
+</p:properties>
+</file>
+
+<file path=customXml/item2.xml><?xml version="1.0" encoding="utf-8"?>
+<?mso-contentType ?>
+<FormTemplates xmlns="http://schemas.microsoft.com/sharepoint/v3/contenttype/forms">
+  <Display>DocumentLibraryForm</Display>
+  <Edit>DocumentLibraryForm</Edit>
+  <New>DocumentLibraryForm</New>
+</FormTemplates>
+</file>
+
+<file path=customXml/item3.xml><?xml version="1.0" encoding="utf-8"?>
 <ct:contentTypeSchema xmlns:ct="http://schemas.microsoft.com/office/2006/metadata/contentType" xmlns:ma="http://schemas.microsoft.com/office/2006/metadata/properties/metaAttributes" ct:_="" ma:_="" ma:contentTypeName="Documento" ma:contentTypeID="0x010100C1766D1EC7BFE944BC766B046067A1F0" ma:contentTypeVersion="15" ma:contentTypeDescription="Crie um novo documento." ma:contentTypeScope="" ma:versionID="006c77f02ae7009e19aac67a6ca6939e">
   <xsd:schema xmlns:xsd="http://www.w3.org/2001/XMLSchema" xmlns:xs="http://www.w3.org/2001/XMLSchema" xmlns:p="http://schemas.microsoft.com/office/2006/metadata/properties" xmlns:ns2="123eb23d-3ad1-49db-90bd-82072a43b63e" xmlns:ns3="a6683bdb-b07b-4cc1-bb82-ad4fae711c06" targetNamespace="http://schemas.microsoft.com/office/2006/metadata/properties" ma:root="true" ma:fieldsID="760ac65c7a716a0ac4df4ea5fca3b62b" ns2:_="" ns3:_="">
     <xsd:import namespace="123eb23d-3ad1-49db-90bd-82072a43b63e"/>
@@ -3977,27 +3975,32 @@
 </ct:contentTypeSchema>
 </file>
 
-<file path=customXml/item2.xml><?xml version="1.0" encoding="utf-8"?>
-<?mso-contentType ?>
-<FormTemplates xmlns="http://schemas.microsoft.com/sharepoint/v3/contenttype/forms">
-  <Display>DocumentLibraryForm</Display>
-  <Edit>DocumentLibraryForm</Edit>
-  <New>DocumentLibraryForm</New>
-</FormTemplates>
+<file path=customXml/itemProps1.xml><?xml version="1.0" encoding="utf-8"?>
+<ds:datastoreItem xmlns:ds="http://schemas.openxmlformats.org/officeDocument/2006/customXml" ds:itemID="{042F6BBE-1607-40D4-BC21-104F6AA413FE}">
+  <ds:schemaRefs>
+    <ds:schemaRef ds:uri="http://purl.org/dc/terms/"/>
+    <ds:schemaRef ds:uri="http://purl.org/dc/elements/1.1/"/>
+    <ds:schemaRef ds:uri="http://schemas.microsoft.com/office/2006/documentManagement/types"/>
+    <ds:schemaRef ds:uri="a6683bdb-b07b-4cc1-bb82-ad4fae711c06"/>
+    <ds:schemaRef ds:uri="http://purl.org/dc/dcmitype/"/>
+    <ds:schemaRef ds:uri="http://schemas.openxmlformats.org/package/2006/metadata/core-properties"/>
+    <ds:schemaRef ds:uri="http://schemas.microsoft.com/office/2006/metadata/properties"/>
+    <ds:schemaRef ds:uri="http://schemas.microsoft.com/office/infopath/2007/PartnerControls"/>
+    <ds:schemaRef ds:uri="123eb23d-3ad1-49db-90bd-82072a43b63e"/>
+    <ds:schemaRef ds:uri="http://www.w3.org/XML/1998/namespace"/>
+  </ds:schemaRefs>
+</ds:datastoreItem>
 </file>
 
-<file path=customXml/item3.xml><?xml version="1.0" encoding="utf-8"?>
-<p:properties xmlns:p="http://schemas.microsoft.com/office/2006/metadata/properties" xmlns:xsi="http://www.w3.org/2001/XMLSchema-instance" xmlns:pc="http://schemas.microsoft.com/office/infopath/2007/PartnerControls">
-  <documentManagement>
-    <TaxCatchAll xmlns="a6683bdb-b07b-4cc1-bb82-ad4fae711c06" xsi:nil="true"/>
-    <lcf76f155ced4ddcb4097134ff3c332f xmlns="123eb23d-3ad1-49db-90bd-82072a43b63e">
-      <Terms xmlns="http://schemas.microsoft.com/office/infopath/2007/PartnerControls"/>
-    </lcf76f155ced4ddcb4097134ff3c332f>
-  </documentManagement>
-</p:properties>
+<file path=customXml/itemProps2.xml><?xml version="1.0" encoding="utf-8"?>
+<ds:datastoreItem xmlns:ds="http://schemas.openxmlformats.org/officeDocument/2006/customXml" ds:itemID="{5E2CF0EE-7FFF-4341-9DF2-1BF8B9A36096}">
+  <ds:schemaRefs>
+    <ds:schemaRef ds:uri="http://schemas.microsoft.com/sharepoint/v3/contenttype/forms"/>
+  </ds:schemaRefs>
+</ds:datastoreItem>
 </file>
 
-<file path=customXml/itemProps1.xml><?xml version="1.0" encoding="utf-8"?>
+<file path=customXml/itemProps3.xml><?xml version="1.0" encoding="utf-8"?>
 <ds:datastoreItem xmlns:ds="http://schemas.openxmlformats.org/officeDocument/2006/customXml" ds:itemID="{6CFECA32-5C95-4772-AFA2-E84DE22E3745}">
   <ds:schemaRefs>
     <ds:schemaRef ds:uri="http://schemas.microsoft.com/office/2006/metadata/contentType"/>
@@ -4014,29 +4017,4 @@
     <ds:schemaRef ds:uri="http://schemas.microsoft.com/internal/obd"/>
   </ds:schemaRefs>
 </ds:datastoreItem>
-</file>
-
-<file path=customXml/itemProps2.xml><?xml version="1.0" encoding="utf-8"?>
-<ds:datastoreItem xmlns:ds="http://schemas.openxmlformats.org/officeDocument/2006/customXml" ds:itemID="{5E2CF0EE-7FFF-4341-9DF2-1BF8B9A36096}">
-  <ds:schemaRefs>
-    <ds:schemaRef ds:uri="http://schemas.microsoft.com/sharepoint/v3/contenttype/forms"/>
-  </ds:schemaRefs>
-</ds:datastoreItem>
-</file>
-
-<file path=customXml/itemProps3.xml><?xml version="1.0" encoding="utf-8"?>
-<ds:datastoreItem xmlns:ds="http://schemas.openxmlformats.org/officeDocument/2006/customXml" ds:itemID="{042F6BBE-1607-40D4-BC21-104F6AA413FE}">
-  <ds:schemaRefs>
-    <ds:schemaRef ds:uri="http://purl.org/dc/terms/"/>
-    <ds:schemaRef ds:uri="http://purl.org/dc/elements/1.1/"/>
-    <ds:schemaRef ds:uri="http://schemas.microsoft.com/office/2006/documentManagement/types"/>
-    <ds:schemaRef ds:uri="a6683bdb-b07b-4cc1-bb82-ad4fae711c06"/>
-    <ds:schemaRef ds:uri="http://purl.org/dc/dcmitype/"/>
-    <ds:schemaRef ds:uri="http://schemas.openxmlformats.org/package/2006/metadata/core-properties"/>
-    <ds:schemaRef ds:uri="http://schemas.microsoft.com/office/2006/metadata/properties"/>
-    <ds:schemaRef ds:uri="http://schemas.microsoft.com/office/infopath/2007/PartnerControls"/>
-    <ds:schemaRef ds:uri="123eb23d-3ad1-49db-90bd-82072a43b63e"/>
-    <ds:schemaRef ds:uri="http://www.w3.org/XML/1998/namespace"/>
-  </ds:schemaRefs>
-</ds:datastoreItem>
 </file>